--- a/Ambiente de Mock para API.pptx
+++ b/Ambiente de Mock para API.pptx
@@ -244,7 +244,7 @@
             <a:pPr rtl="0"/>
             <a:fld id="{6E8952C1-FF49-4DE9-B273-63B21BE8D19A}" type="datetime1">
               <a:rPr lang="pt-BR" smtClean="0"/>
-              <a:t>13/04/2025</a:t>
+              <a:t>14/04/2025</a:t>
             </a:fld>
             <a:endParaRPr lang="pt-BR" dirty="0"/>
           </a:p>
@@ -425,7 +425,7 @@
             <a:fld id="{28CE1D23-92FC-4FDC-88AB-1F1F9BAAB6C3}" type="datetime1">
               <a:rPr lang="pt-BR" smtClean="0"/>
               <a:pPr/>
-              <a:t>13/04/2025</a:t>
+              <a:t>14/04/2025</a:t>
             </a:fld>
             <a:endParaRPr lang="pt-BR" dirty="0"/>
           </a:p>
@@ -2652,7 +2652,7 @@
             <a:fld id="{D6D8061D-18C3-4F4F-85EF-561633F58754}" type="datetimeFigureOut">
               <a:rPr lang="pt-BR" smtClean="0"/>
               <a:pPr/>
-              <a:t>13/04/2025</a:t>
+              <a:t>14/04/2025</a:t>
             </a:fld>
             <a:endParaRPr lang="pt-BR" dirty="0"/>
           </a:p>
@@ -2960,7 +2960,7 @@
             <a:fld id="{D6D8061D-18C3-4F4F-85EF-561633F58754}" type="datetimeFigureOut">
               <a:rPr lang="pt-BR" smtClean="0"/>
               <a:pPr/>
-              <a:t>13/04/2025</a:t>
+              <a:t>14/04/2025</a:t>
             </a:fld>
             <a:endParaRPr lang="pt-BR"/>
           </a:p>
@@ -3398,7 +3398,7 @@
           <a:p>
             <a:fld id="{241EB5C9-1307-BA42-ABA2-0BC069CD8E7F}" type="datetimeFigureOut">
               <a:rPr lang="en-US" smtClean="0"/>
-              <a:t>4/13/2025</a:t>
+              <a:t>4/14/2025</a:t>
             </a:fld>
             <a:endParaRPr lang="en-US"/>
           </a:p>
@@ -3673,7 +3673,7 @@
           <a:p>
             <a:fld id="{241EB5C9-1307-BA42-ABA2-0BC069CD8E7F}" type="datetimeFigureOut">
               <a:rPr lang="en-US" smtClean="0"/>
-              <a:t>4/13/2025</a:t>
+              <a:t>4/14/2025</a:t>
             </a:fld>
             <a:endParaRPr lang="en-US"/>
           </a:p>
@@ -5272,7 +5272,7 @@
             <a:fld id="{D6D8061D-18C3-4F4F-85EF-561633F58754}" type="datetimeFigureOut">
               <a:rPr lang="pt-BR" smtClean="0"/>
               <a:pPr/>
-              <a:t>13/04/2025</a:t>
+              <a:t>14/04/2025</a:t>
             </a:fld>
             <a:endParaRPr lang="pt-BR" dirty="0"/>
           </a:p>
@@ -5829,7 +5829,7 @@
             <a:fld id="{D6D8061D-18C3-4F4F-85EF-561633F58754}" type="datetimeFigureOut">
               <a:rPr lang="pt-BR" smtClean="0"/>
               <a:pPr/>
-              <a:t>13/04/2025</a:t>
+              <a:t>14/04/2025</a:t>
             </a:fld>
             <a:endParaRPr lang="pt-BR" dirty="0"/>
           </a:p>
@@ -6634,7 +6634,7 @@
             <a:fld id="{D6D8061D-18C3-4F4F-85EF-561633F58754}" type="datetimeFigureOut">
               <a:rPr lang="pt-BR" smtClean="0"/>
               <a:pPr/>
-              <a:t>13/04/2025</a:t>
+              <a:t>14/04/2025</a:t>
             </a:fld>
             <a:endParaRPr lang="pt-BR" dirty="0"/>
           </a:p>
@@ -6909,7 +6909,7 @@
             <a:fld id="{D6D8061D-18C3-4F4F-85EF-561633F58754}" type="datetimeFigureOut">
               <a:rPr lang="pt-BR" smtClean="0"/>
               <a:pPr/>
-              <a:t>13/04/2025</a:t>
+              <a:t>14/04/2025</a:t>
             </a:fld>
             <a:endParaRPr lang="pt-BR" dirty="0"/>
           </a:p>
@@ -9205,15 +9205,6 @@
           <a:solidFill>
             <a:srgbClr val="FFFFFF"/>
           </a:solidFill>
-          <a:extLst>
-            <a:ext uri="{909E8E84-426E-40DD-AFC4-6F175D3DCCD1}">
-              <a14:hiddenFill xmlns:a14="http://schemas.microsoft.com/office/drawing/2010/main">
-                <a:solidFill>
-                  <a:srgbClr val="FFFFFF"/>
-                </a:solidFill>
-              </a14:hiddenFill>
-            </a:ext>
-          </a:extLst>
         </p:spPr>
       </p:pic>
       <p:sp>
@@ -11393,13 +11384,13 @@
         <p:spPr>
           <a:xfrm>
             <a:off x="6562817" y="1190171"/>
-            <a:ext cx="5063125" cy="4698565"/>
+            <a:ext cx="5121183" cy="4698565"/>
           </a:xfrm>
           <a:noFill/>
         </p:spPr>
         <p:txBody>
           <a:bodyPr rtlCol="0" anchor="t">
-            <a:normAutofit fontScale="92500"/>
+            <a:normAutofit/>
           </a:bodyPr>
           <a:lstStyle>
             <a:defPPr>
@@ -11412,7 +11403,7 @@
               <a:buChar char="•"/>
             </a:pPr>
             <a:r>
-              <a:rPr lang="pt-BR" dirty="0">
+              <a:rPr lang="pt-BR" sz="2400" dirty="0">
                 <a:solidFill>
                   <a:schemeClr val="accent1">
                     <a:lumMod val="75000"/>
@@ -11428,7 +11419,7 @@
               <a:buChar char="•"/>
             </a:pPr>
             <a:r>
-              <a:rPr lang="pt-BR" dirty="0">
+              <a:rPr lang="pt-BR" sz="2400" dirty="0">
                 <a:solidFill>
                   <a:schemeClr val="accent1">
                     <a:lumMod val="75000"/>
@@ -11444,14 +11435,14 @@
               <a:buChar char="•"/>
             </a:pPr>
             <a:r>
-              <a:rPr lang="pt-BR" dirty="0">
+              <a:rPr lang="pt-BR" sz="2400" dirty="0">
                 <a:solidFill>
                   <a:schemeClr val="accent1">
                     <a:lumMod val="75000"/>
                   </a:schemeClr>
                 </a:solidFill>
               </a:rPr>
-              <a:t>Solução Técnica</a:t>
+              <a:t>Hands-on</a:t>
             </a:r>
           </a:p>
           <a:p>
@@ -11460,14 +11451,14 @@
               <a:buChar char="•"/>
             </a:pPr>
             <a:r>
-              <a:rPr lang="pt-BR" dirty="0">
+              <a:rPr lang="pt-BR" sz="2400" dirty="0">
                 <a:solidFill>
                   <a:schemeClr val="accent1">
                     <a:lumMod val="75000"/>
                   </a:schemeClr>
                 </a:solidFill>
               </a:rPr>
-              <a:t>Demonstração ao Vivo</a:t>
+              <a:t>Arquivos Utilizados</a:t>
             </a:r>
           </a:p>
           <a:p>
@@ -11476,14 +11467,14 @@
               <a:buChar char="•"/>
             </a:pPr>
             <a:r>
-              <a:rPr lang="pt-BR" dirty="0">
+              <a:rPr lang="pt-BR" sz="2400" dirty="0">
                 <a:solidFill>
                   <a:schemeClr val="accent1">
                     <a:lumMod val="75000"/>
                   </a:schemeClr>
                 </a:solidFill>
               </a:rPr>
-              <a:t>Benefícios e Casos de Uso</a:t>
+              <a:t>Próximos passos</a:t>
             </a:r>
           </a:p>
           <a:p>
@@ -11492,39 +11483,7 @@
               <a:buChar char="•"/>
             </a:pPr>
             <a:r>
-              <a:rPr lang="pt-BR" dirty="0">
-                <a:solidFill>
-                  <a:schemeClr val="accent1">
-                    <a:lumMod val="75000"/>
-                  </a:schemeClr>
-                </a:solidFill>
-              </a:rPr>
-              <a:t>Guia Prático de Implementação</a:t>
-            </a:r>
-          </a:p>
-          <a:p>
-            <a:pPr marL="285750" lvl="1" indent="-285750">
-              <a:buFont typeface="Arial" panose="020B0604020202020204" pitchFamily="34" charset="0"/>
-              <a:buChar char="•"/>
-            </a:pPr>
-            <a:r>
-              <a:rPr lang="pt-BR" dirty="0">
-                <a:solidFill>
-                  <a:schemeClr val="accent1">
-                    <a:lumMod val="75000"/>
-                  </a:schemeClr>
-                </a:solidFill>
-              </a:rPr>
-              <a:t>Conclusão e Próximos Passos</a:t>
-            </a:r>
-          </a:p>
-          <a:p>
-            <a:pPr marL="285750" lvl="1" indent="-285750">
-              <a:buFont typeface="Arial" panose="020B0604020202020204" pitchFamily="34" charset="0"/>
-              <a:buChar char="•"/>
-            </a:pPr>
-            <a:r>
-              <a:rPr lang="pt-BR" dirty="0">
+              <a:rPr lang="pt-BR" sz="2400" dirty="0">
                 <a:solidFill>
                   <a:schemeClr val="accent1">
                     <a:lumMod val="75000"/>
@@ -14180,6 +14139,15 @@
 </file>
 
 <file path=customXml/item1.xml><?xml version="1.0" encoding="utf-8"?>
+<?mso-contentType ?>
+<FormTemplates xmlns="http://schemas.microsoft.com/sharepoint/v3/contenttype/forms">
+  <Display>DocumentLibraryForm</Display>
+  <Edit>DocumentLibraryForm</Edit>
+  <New>DocumentLibraryForm</New>
+</FormTemplates>
+</file>
+
+<file path=customXml/item2.xml><?xml version="1.0" encoding="utf-8"?>
 <p:properties xmlns:p="http://schemas.microsoft.com/office/2006/metadata/properties" xmlns:xsi="http://www.w3.org/2001/XMLSchema-instance" xmlns:pc="http://schemas.microsoft.com/office/infopath/2007/PartnerControls">
   <documentManagement>
     <_ip_UnifiedCompliancePolicyUIAction xmlns="http://schemas.microsoft.com/sharepoint/v3" xsi:nil="true"/>
@@ -14197,15 +14165,6 @@
     <MediaServiceKeyPoints xmlns="71af3243-3dd4-4a8d-8c0d-dd76da1f02a5" xsi:nil="true"/>
   </documentManagement>
 </p:properties>
-</file>
-
-<file path=customXml/item2.xml><?xml version="1.0" encoding="utf-8"?>
-<?mso-contentType ?>
-<FormTemplates xmlns="http://schemas.microsoft.com/sharepoint/v3/contenttype/forms">
-  <Display>DocumentLibraryForm</Display>
-  <Edit>DocumentLibraryForm</Edit>
-  <New>DocumentLibraryForm</New>
-</FormTemplates>
 </file>
 
 <file path=customXml/item3.xml><?xml version="1.0" encoding="utf-8"?>
@@ -14521,6 +14480,14 @@
 </file>
 
 <file path=customXml/itemProps1.xml><?xml version="1.0" encoding="utf-8"?>
+<ds:datastoreItem xmlns:ds="http://schemas.openxmlformats.org/officeDocument/2006/customXml" ds:itemID="{0F048343-1EA9-44C3-883E-652FAAF0713E}">
+  <ds:schemaRefs>
+    <ds:schemaRef ds:uri="http://schemas.microsoft.com/sharepoint/v3/contenttype/forms"/>
+  </ds:schemaRefs>
+</ds:datastoreItem>
+</file>
+
+<file path=customXml/itemProps2.xml><?xml version="1.0" encoding="utf-8"?>
 <ds:datastoreItem xmlns:ds="http://schemas.openxmlformats.org/officeDocument/2006/customXml" ds:itemID="{85C2645A-E767-4D7E-984D-234E531E4556}">
   <ds:schemaRefs>
     <ds:schemaRef ds:uri="http://schemas.microsoft.com/office/2006/metadata/properties"/>
@@ -14528,14 +14495,6 @@
     <ds:schemaRef ds:uri="http://schemas.microsoft.com/sharepoint/v3"/>
     <ds:schemaRef ds:uri="71af3243-3dd4-4a8d-8c0d-dd76da1f02a5"/>
     <ds:schemaRef ds:uri="230e9df3-be65-4c73-a93b-d1236ebd677e"/>
-  </ds:schemaRefs>
-</ds:datastoreItem>
-</file>
-
-<file path=customXml/itemProps2.xml><?xml version="1.0" encoding="utf-8"?>
-<ds:datastoreItem xmlns:ds="http://schemas.openxmlformats.org/officeDocument/2006/customXml" ds:itemID="{0F048343-1EA9-44C3-883E-652FAAF0713E}">
-  <ds:schemaRefs>
-    <ds:schemaRef ds:uri="http://schemas.microsoft.com/sharepoint/v3/contenttype/forms"/>
   </ds:schemaRefs>
 </ds:datastoreItem>
 </file>
